--- a/黒崎/AI研修一覧/A-108_AIと著作権・個人情報/スライド.pptx
+++ b/黒崎/AI研修一覧/A-108_AIと著作権・個人情報/スライド.pptx
@@ -2149,14 +2149,16 @@
           <a:ln/>
         </p:spPr>
         <p:txBody>
-          <a:bodyPr wrap="square" lIns="0" tIns="0" rIns="0" bIns="0" rtlCol="0" anchor="ctr"/>
+          <a:bodyPr wrap="square" lIns="0" tIns="0" rIns="0" bIns="0" rtlCol="0" anchor="ctr">
+            <a:normAutofit/>
+          </a:bodyPr>
           <a:lstStyle/>
           <a:p>
             <a:pPr indent="0" marL="0">
               <a:buNone/>
             </a:pPr>
             <a:r>
-              <a:rPr lang="en-US" sz="3200" b="1" dirty="0">
+              <a:rPr lang="en-US" sz="2200" b="1" dirty="0">
                 <a:solidFill>
                   <a:srgbClr val="111827"/>
                 </a:solidFill>
@@ -2166,7 +2168,7 @@
               </a:rPr>
               <a:t>AI利用ガイドラインの4つの柱</a:t>
             </a:r>
-            <a:endParaRPr lang="en-US" sz="3200" dirty="0"/>
+            <a:endParaRPr lang="en-US" sz="2200" dirty="0"/>
           </a:p>
         </p:txBody>
       </p:sp>
@@ -3079,14 +3081,16 @@
           <a:ln/>
         </p:spPr>
         <p:txBody>
-          <a:bodyPr wrap="square" lIns="0" tIns="0" rIns="0" bIns="0" rtlCol="0" anchor="ctr"/>
+          <a:bodyPr wrap="square" lIns="0" tIns="0" rIns="0" bIns="0" rtlCol="0" anchor="ctr">
+            <a:normAutofit/>
+          </a:bodyPr>
           <a:lstStyle/>
           <a:p>
             <a:pPr indent="0" marL="0">
               <a:buNone/>
             </a:pPr>
             <a:r>
-              <a:rPr lang="en-US" sz="3200" b="1" dirty="0">
+              <a:rPr lang="en-US" sz="2200" b="1" dirty="0">
                 <a:solidFill>
                   <a:srgbClr val="111827"/>
                 </a:solidFill>
@@ -3096,7 +3100,7 @@
               </a:rPr>
               <a:t>今日のまとめ</a:t>
             </a:r>
-            <a:endParaRPr lang="en-US" sz="3200" dirty="0"/>
+            <a:endParaRPr lang="en-US" sz="2200" dirty="0"/>
           </a:p>
         </p:txBody>
       </p:sp>
@@ -4003,14 +4007,16 @@
           <a:ln/>
         </p:spPr>
         <p:txBody>
-          <a:bodyPr wrap="square" lIns="0" tIns="0" rIns="0" bIns="0" rtlCol="0" anchor="ctr"/>
+          <a:bodyPr wrap="square" lIns="0" tIns="0" rIns="0" bIns="0" rtlCol="0" anchor="ctr">
+            <a:normAutofit/>
+          </a:bodyPr>
           <a:lstStyle/>
           <a:p>
             <a:pPr indent="0" marL="0">
               <a:buNone/>
             </a:pPr>
             <a:r>
-              <a:rPr lang="en-US" sz="3200" b="1" dirty="0">
+              <a:rPr lang="en-US" sz="2200" b="1" dirty="0">
                 <a:solidFill>
                   <a:srgbClr val="111827"/>
                 </a:solidFill>
@@ -4020,7 +4026,7 @@
               </a:rPr>
               <a:t>今日のゴール</a:t>
             </a:r>
-            <a:endParaRPr lang="en-US" sz="3200" dirty="0"/>
+            <a:endParaRPr lang="en-US" sz="2200" dirty="0"/>
           </a:p>
         </p:txBody>
       </p:sp>
@@ -4542,14 +4548,16 @@
           <a:ln/>
         </p:spPr>
         <p:txBody>
-          <a:bodyPr wrap="square" lIns="0" tIns="0" rIns="0" bIns="0" rtlCol="0" anchor="ctr"/>
+          <a:bodyPr wrap="square" lIns="0" tIns="0" rIns="0" bIns="0" rtlCol="0" anchor="ctr">
+            <a:normAutofit/>
+          </a:bodyPr>
           <a:lstStyle/>
           <a:p>
             <a:pPr indent="0" marL="0">
               <a:buNone/>
             </a:pPr>
             <a:r>
-              <a:rPr lang="en-US" sz="3200" b="1" dirty="0">
+              <a:rPr lang="en-US" sz="2200" b="1" dirty="0">
                 <a:solidFill>
                   <a:srgbClr val="111827"/>
                 </a:solidFill>
@@ -4559,7 +4567,7 @@
               </a:rPr>
               <a:t>AIと著作権 — 2つの問題を区別する</a:t>
             </a:r>
-            <a:endParaRPr lang="en-US" sz="3200" dirty="0"/>
+            <a:endParaRPr lang="en-US" sz="2200" dirty="0"/>
           </a:p>
         </p:txBody>
       </p:sp>
@@ -5248,14 +5256,16 @@
           <a:ln/>
         </p:spPr>
         <p:txBody>
-          <a:bodyPr wrap="square" lIns="0" tIns="0" rIns="0" bIns="0" rtlCol="0" anchor="ctr"/>
+          <a:bodyPr wrap="square" lIns="0" tIns="0" rIns="0" bIns="0" rtlCol="0" anchor="ctr">
+            <a:normAutofit/>
+          </a:bodyPr>
           <a:lstStyle/>
           <a:p>
             <a:pPr indent="0" marL="0">
               <a:buNone/>
             </a:pPr>
             <a:r>
-              <a:rPr lang="en-US" sz="3200" b="1" dirty="0">
+              <a:rPr lang="en-US" sz="2200" b="1" dirty="0">
                 <a:solidFill>
                   <a:srgbClr val="111827"/>
                 </a:solidFill>
@@ -5265,7 +5275,7 @@
               </a:rPr>
               <a:t>学習データの著作権 — 著作権法30条の4</a:t>
             </a:r>
-            <a:endParaRPr lang="en-US" sz="3200" dirty="0"/>
+            <a:endParaRPr lang="en-US" sz="2200" dirty="0"/>
           </a:p>
         </p:txBody>
       </p:sp>
@@ -5879,14 +5889,16 @@
           <a:ln/>
         </p:spPr>
         <p:txBody>
-          <a:bodyPr wrap="square" lIns="0" tIns="0" rIns="0" bIns="0" rtlCol="0" anchor="ctr"/>
+          <a:bodyPr wrap="square" lIns="0" tIns="0" rIns="0" bIns="0" rtlCol="0" anchor="ctr">
+            <a:normAutofit/>
+          </a:bodyPr>
           <a:lstStyle/>
           <a:p>
             <a:pPr indent="0" marL="0">
               <a:buNone/>
             </a:pPr>
             <a:r>
-              <a:rPr lang="en-US" sz="3200" b="1" dirty="0">
+              <a:rPr lang="en-US" sz="2200" b="1" dirty="0">
                 <a:solidFill>
                   <a:srgbClr val="111827"/>
                 </a:solidFill>
@@ -5896,7 +5908,7 @@
               </a:rPr>
               <a:t>AI生成物に著作権はあるか？</a:t>
             </a:r>
-            <a:endParaRPr lang="en-US" sz="3200" dirty="0"/>
+            <a:endParaRPr lang="en-US" sz="2200" dirty="0"/>
           </a:p>
         </p:txBody>
       </p:sp>
@@ -6661,14 +6673,16 @@
           <a:ln/>
         </p:spPr>
         <p:txBody>
-          <a:bodyPr wrap="square" lIns="0" tIns="0" rIns="0" bIns="0" rtlCol="0" anchor="ctr"/>
+          <a:bodyPr wrap="square" lIns="0" tIns="0" rIns="0" bIns="0" rtlCol="0" anchor="ctr">
+            <a:normAutofit/>
+          </a:bodyPr>
           <a:lstStyle/>
           <a:p>
             <a:pPr indent="0" marL="0">
               <a:buNone/>
             </a:pPr>
             <a:r>
-              <a:rPr lang="en-US" sz="3200" b="1" dirty="0">
+              <a:rPr lang="en-US" sz="2200" b="1" dirty="0">
                 <a:solidFill>
                   <a:srgbClr val="111827"/>
                 </a:solidFill>
@@ -6678,7 +6692,7 @@
               </a:rPr>
               <a:t>実務で注意すべき著作権リスク</a:t>
             </a:r>
-            <a:endParaRPr lang="en-US" sz="3200" dirty="0"/>
+            <a:endParaRPr lang="en-US" sz="2200" dirty="0"/>
           </a:p>
         </p:txBody>
       </p:sp>
@@ -7297,14 +7311,16 @@
           <a:ln/>
         </p:spPr>
         <p:txBody>
-          <a:bodyPr wrap="square" lIns="0" tIns="0" rIns="0" bIns="0" rtlCol="0" anchor="ctr"/>
+          <a:bodyPr wrap="square" lIns="0" tIns="0" rIns="0" bIns="0" rtlCol="0" anchor="ctr">
+            <a:normAutofit/>
+          </a:bodyPr>
           <a:lstStyle/>
           <a:p>
             <a:pPr indent="0" marL="0">
               <a:buNone/>
             </a:pPr>
             <a:r>
-              <a:rPr lang="en-US" sz="3200" b="1" dirty="0">
+              <a:rPr lang="en-US" sz="2200" b="1" dirty="0">
                 <a:solidFill>
                   <a:srgbClr val="111827"/>
                 </a:solidFill>
@@ -7314,7 +7330,7 @@
               </a:rPr>
               <a:t>個人情報保護法とAI</a:t>
             </a:r>
-            <a:endParaRPr lang="en-US" sz="3200" dirty="0"/>
+            <a:endParaRPr lang="en-US" sz="2200" dirty="0"/>
           </a:p>
         </p:txBody>
       </p:sp>
@@ -8051,14 +8067,16 @@
           <a:ln/>
         </p:spPr>
         <p:txBody>
-          <a:bodyPr wrap="square" lIns="0" tIns="0" rIns="0" bIns="0" rtlCol="0" anchor="ctr"/>
+          <a:bodyPr wrap="square" lIns="0" tIns="0" rIns="0" bIns="0" rtlCol="0" anchor="ctr">
+            <a:normAutofit/>
+          </a:bodyPr>
           <a:lstStyle/>
           <a:p>
             <a:pPr indent="0" marL="0">
               <a:buNone/>
             </a:pPr>
             <a:r>
-              <a:rPr lang="en-US" sz="3200" b="1" dirty="0">
+              <a:rPr lang="en-US" sz="2200" b="1" dirty="0">
                 <a:solidFill>
                   <a:srgbClr val="111827"/>
                 </a:solidFill>
@@ -8068,7 +8086,7 @@
               </a:rPr>
               <a:t>AIに入力してはいけない情報</a:t>
             </a:r>
-            <a:endParaRPr lang="en-US" sz="3200" dirty="0"/>
+            <a:endParaRPr lang="en-US" sz="2200" dirty="0"/>
           </a:p>
         </p:txBody>
       </p:sp>
@@ -9074,14 +9092,16 @@
           <a:ln/>
         </p:spPr>
         <p:txBody>
-          <a:bodyPr wrap="square" lIns="0" tIns="0" rIns="0" bIns="0" rtlCol="0" anchor="ctr"/>
+          <a:bodyPr wrap="square" lIns="0" tIns="0" rIns="0" bIns="0" rtlCol="0" anchor="ctr">
+            <a:normAutofit/>
+          </a:bodyPr>
           <a:lstStyle/>
           <a:p>
             <a:pPr indent="0" marL="0">
               <a:buNone/>
             </a:pPr>
             <a:r>
-              <a:rPr lang="en-US" sz="3200" b="1" dirty="0">
+              <a:rPr lang="en-US" sz="2200" b="1" dirty="0">
                 <a:solidFill>
                   <a:srgbClr val="111827"/>
                 </a:solidFill>
@@ -9091,7 +9111,7 @@
               </a:rPr>
               <a:t>安全にAIを使うための5つの実践</a:t>
             </a:r>
-            <a:endParaRPr lang="en-US" sz="3200" dirty="0"/>
+            <a:endParaRPr lang="en-US" sz="2200" dirty="0"/>
           </a:p>
         </p:txBody>
       </p:sp>
